--- a/slides/Dynamics_Atlas_slides.pptx
+++ b/slides/Dynamics_Atlas_slides.pptx
@@ -1963,7 +1963,7 @@
           <a:p>
             <a:r>
               <a:rPr lang="en-US" dirty="0"/>
-              <a:t>Authors’ claim. Henot and colleagues show that the closed state of the HSP90 N-terminal domain is transiently populated. NMR relaxation shows exchange on the millisecond scale. They ran 40 MD trajectories of 1 µs, 20 from the open crystal structure and 20 from a closed model, and used NOE violations to classify the closed-start runs as 7 near-closed, about 9 toward open and 4 neither.
+              <a:t>Authors’ claim. Henot and colleagues show that the closed state of the HSP90 N-terminal domain is transiently populated. NMR relaxation shows exchange on the millisecond scale. They ran 40 MD trajectories of 1 µs, 20 from representative open-state conformers and 20 from closed-state conformers of the authors’ structural ensembles, and used NOE violations to classify the closed-start runs as 7 near-closed, about 9 toward open and 4 neither.
 What we tested. If a closed-start trajectory moves toward the open state by a relative measure, does it also agree with the open-state NOE restraints? Ten of the twenty closed-start runs show a sustained move toward open, close to the authors’ about nine. We then compared every run with the authors’ own NOE violation series. At 1 Å, nine of those ten spend most of that time far from both the open and the closed reference, one agrees partly, none agrees throughout. The 20 open-start runs pass the same test in 18 cases, so the test does detect agreement when it is there.
 What it means. The movement is real: one run falls from 9.1 to 1.1 Å. But moving toward a state, agreeing with it, and completing a transition are three different claims, and these trajectories support the first. The tolerances are our own working definitions; appendix A1 discusses how agreement should be defined.
 Sources: Henot et al. 2022, Nat Commun https://doi.org/10.1038/s41467-022-35399-8 | RESULTS.md, case by case https://github.com/alex051107/dynamics-atlas-harness/blob/overview/RESULTS.md</a:t>
